--- a/學而1.4.pptx
+++ b/學而1.4.pptx
@@ -11693,8 +11693,8 @@
         </p:nvSpPr>
         <p:spPr>
           <a:xfrm>
-            <a:off x="168165" y="868912"/>
-            <a:ext cx="8807670" cy="584775"/>
+            <a:off x="2557" y="868912"/>
+            <a:ext cx="1185952" cy="584775"/>
           </a:xfrm>
           <a:prstGeom prst="rect">
             <a:avLst/>
@@ -11705,7 +11705,7 @@
           </a:ln>
         </p:spPr>
         <p:txBody>
-          <a:bodyPr anchorCtr="0" anchor="t" bIns="45700" lIns="91425" spcFirstLastPara="1" rIns="91425" wrap="square" tIns="45700">
+          <a:bodyPr anchorCtr="0" anchor="t" bIns="45700" lIns="0" spcFirstLastPara="1" rIns="0" wrap="none" tIns="45700">
             <a:spAutoFit/>
           </a:bodyPr>
           <a:lstStyle/>
@@ -11728,18 +11728,7 @@
                 <a:ea typeface="Calibri"/>
                 <a:cs typeface="Calibri"/>
               </a:rPr>
-              <a:t>Zēng  zǐ   yuē</a:t>
-            </a:r>
-            <a:r>
-              <a:rPr lang="en-US" sz="3200" u="none">
-                <a:solidFill>
-                  <a:schemeClr val="dk1"/>
-                </a:solidFill>
-                <a:latin typeface="Calibri"/>
-                <a:ea typeface="Calibri"/>
-                <a:cs typeface="Calibri"/>
-              </a:rPr>
-              <a:t>   :</a:t>
+              <a:t>Zēng</a:t>
             </a:r>
             <a:endParaRPr sz="3200">
               <a:solidFill>
@@ -11754,7 +11743,175 @@
       </p:sp>
       <p:sp>
         <p:nvSpPr>
-          <p:cNvPr id="4" name="english_5"/>
+          <p:cNvPr id="4" name="pinyin_5"/>
+          <p:cNvSpPr txBox="1"/>
+          <p:nvPr/>
+        </p:nvSpPr>
+        <p:spPr>
+          <a:xfrm>
+            <a:off x="988509" y="868912"/>
+            <a:ext cx="625120" cy="584775"/>
+          </a:xfrm>
+          <a:prstGeom prst="rect">
+            <a:avLst/>
+          </a:prstGeom>
+          <a:noFill/>
+          <a:ln>
+            <a:noFill/>
+          </a:ln>
+        </p:spPr>
+        <p:txBody>
+          <a:bodyPr anchorCtr="0" anchor="t" bIns="45700" lIns="0" spcFirstLastPara="1" rIns="0" wrap="none" tIns="45700">
+            <a:spAutoFit/>
+          </a:bodyPr>
+          <a:lstStyle/>
+          <a:p>
+            <a:pPr indent="0" lvl="0" marL="0" marR="0" rtl="0" algn="l">
+              <a:spcBef>
+                <a:spcPts val="0"/>
+              </a:spcBef>
+              <a:spcAft>
+                <a:spcPts val="0"/>
+              </a:spcAft>
+              <a:buNone/>
+            </a:pPr>
+            <a:r>
+              <a:rPr lang="en-US" sz="3200" u="sng">
+                <a:solidFill>
+                  <a:schemeClr val="dk1"/>
+                </a:solidFill>
+                <a:latin typeface="Calibri"/>
+                <a:ea typeface="Calibri"/>
+                <a:cs typeface="Calibri"/>
+              </a:rPr>
+              <a:t>zǐ</a:t>
+            </a:r>
+            <a:endParaRPr sz="3200">
+              <a:solidFill>
+                <a:schemeClr val="dk1"/>
+              </a:solidFill>
+              <a:latin typeface="Calibri"/>
+              <a:ea typeface="Calibri"/>
+              <a:cs typeface="Calibri"/>
+            </a:endParaRPr>
+          </a:p>
+        </p:txBody>
+      </p:sp>
+      <p:sp>
+        <p:nvSpPr>
+          <p:cNvPr id="5" name="pinyin_6"/>
+          <p:cNvSpPr txBox="1"/>
+          <p:nvPr/>
+        </p:nvSpPr>
+        <p:spPr>
+          <a:xfrm>
+            <a:off x="1413629" y="868912"/>
+            <a:ext cx="933984" cy="584775"/>
+          </a:xfrm>
+          <a:prstGeom prst="rect">
+            <a:avLst/>
+          </a:prstGeom>
+          <a:noFill/>
+          <a:ln>
+            <a:noFill/>
+          </a:ln>
+        </p:spPr>
+        <p:txBody>
+          <a:bodyPr anchorCtr="0" anchor="t" bIns="45700" lIns="0" spcFirstLastPara="1" rIns="0" wrap="none" tIns="45700">
+            <a:spAutoFit/>
+          </a:bodyPr>
+          <a:lstStyle/>
+          <a:p>
+            <a:pPr indent="0" lvl="0" marL="0" marR="0" rtl="0" algn="l">
+              <a:spcBef>
+                <a:spcPts val="0"/>
+              </a:spcBef>
+              <a:spcAft>
+                <a:spcPts val="0"/>
+              </a:spcAft>
+              <a:buNone/>
+            </a:pPr>
+            <a:r>
+              <a:rPr lang="en-US" sz="3200" u="sng">
+                <a:solidFill>
+                  <a:schemeClr val="dk1"/>
+                </a:solidFill>
+                <a:latin typeface="Calibri"/>
+                <a:ea typeface="Calibri"/>
+                <a:cs typeface="Calibri"/>
+              </a:rPr>
+              <a:t>yuē</a:t>
+            </a:r>
+            <a:endParaRPr sz="3200">
+              <a:solidFill>
+                <a:schemeClr val="dk1"/>
+              </a:solidFill>
+              <a:latin typeface="Calibri"/>
+              <a:ea typeface="Calibri"/>
+              <a:cs typeface="Calibri"/>
+            </a:endParaRPr>
+          </a:p>
+        </p:txBody>
+      </p:sp>
+      <p:sp>
+        <p:nvSpPr>
+          <p:cNvPr id="6" name="pinyin_7"/>
+          <p:cNvSpPr txBox="1"/>
+          <p:nvPr/>
+        </p:nvSpPr>
+        <p:spPr>
+          <a:xfrm>
+            <a:off x="2147613" y="868912"/>
+            <a:ext cx="421920" cy="584775"/>
+          </a:xfrm>
+          <a:prstGeom prst="rect">
+            <a:avLst/>
+          </a:prstGeom>
+          <a:noFill/>
+          <a:ln>
+            <a:noFill/>
+          </a:ln>
+        </p:spPr>
+        <p:txBody>
+          <a:bodyPr anchorCtr="0" anchor="t" bIns="45700" lIns="0" spcFirstLastPara="1" rIns="0" wrap="none" tIns="45700">
+            <a:spAutoFit/>
+          </a:bodyPr>
+          <a:lstStyle/>
+          <a:p>
+            <a:pPr indent="0" lvl="0" marL="0" marR="0" rtl="0" algn="l">
+              <a:spcBef>
+                <a:spcPts val="0"/>
+              </a:spcBef>
+              <a:spcAft>
+                <a:spcPts val="0"/>
+              </a:spcAft>
+              <a:buNone/>
+            </a:pPr>
+            <a:r>
+              <a:rPr lang="en-US" sz="3200" u="none">
+                <a:solidFill>
+                  <a:schemeClr val="dk1"/>
+                </a:solidFill>
+                <a:latin typeface="Calibri"/>
+                <a:ea typeface="Calibri"/>
+                <a:cs typeface="Calibri"/>
+              </a:rPr>
+              <a:t>:</a:t>
+            </a:r>
+            <a:endParaRPr sz="3200">
+              <a:solidFill>
+                <a:schemeClr val="dk1"/>
+              </a:solidFill>
+              <a:latin typeface="Calibri"/>
+              <a:ea typeface="Calibri"/>
+              <a:cs typeface="Calibri"/>
+            </a:endParaRPr>
+          </a:p>
+        </p:txBody>
+      </p:sp>
+      <p:sp>
+        <p:nvSpPr>
+          <p:cNvPr id="7" name="english_8"/>
           <p:cNvSpPr txBox="1"/>
           <p:nvPr/>
         </p:nvSpPr>
@@ -11810,7 +11967,7 @@
       </p:sp>
       <p:pic>
         <p:nvPicPr>
-          <p:cNvPr id="5" name="bpmf_img_6"/>
+          <p:cNvPr id="8" name="bpmf_img_9"/>
           <p:cNvPicPr preferRelativeResize="0"/>
           <p:nvPr/>
         </p:nvPicPr>
@@ -11837,14 +11994,14 @@
       </p:pic>
       <p:sp>
         <p:nvSpPr>
-          <p:cNvPr id="6" name="pinyin_7"/>
+          <p:cNvPr id="9" name="pinyin_10"/>
           <p:cNvSpPr txBox="1"/>
           <p:nvPr/>
         </p:nvSpPr>
         <p:spPr>
           <a:xfrm>
-            <a:off x="168165" y="3036112"/>
-            <a:ext cx="8807670" cy="584775"/>
+            <a:off x="383557" y="3036112"/>
+            <a:ext cx="844576" cy="584775"/>
           </a:xfrm>
           <a:prstGeom prst="rect">
             <a:avLst/>
@@ -11855,7 +12012,7 @@
           </a:ln>
         </p:spPr>
         <p:txBody>
-          <a:bodyPr anchorCtr="0" anchor="t" bIns="45700" lIns="91425" spcFirstLastPara="1" rIns="91425" wrap="square" tIns="45700">
+          <a:bodyPr anchorCtr="0" anchor="t" bIns="45700" lIns="0" spcFirstLastPara="1" rIns="0" wrap="none" tIns="45700">
             <a:spAutoFit/>
           </a:bodyPr>
           <a:lstStyle/>
@@ -11878,18 +12035,7 @@
                 <a:ea typeface="Calibri"/>
                 <a:cs typeface="Calibri"/>
               </a:rPr>
-              <a:t>Wú   rì   sān   xǐng   wú   shēn</a:t>
-            </a:r>
-            <a:r>
-              <a:rPr lang="en-US" sz="3200" u="none">
-                <a:solidFill>
-                  <a:schemeClr val="dk1"/>
-                </a:solidFill>
-                <a:latin typeface="Calibri"/>
-                <a:ea typeface="Calibri"/>
-                <a:cs typeface="Calibri"/>
-              </a:rPr>
-              <a:t>   :</a:t>
+              <a:t>Wú</a:t>
             </a:r>
             <a:endParaRPr sz="3200">
               <a:solidFill>
@@ -11904,7 +12050,343 @@
       </p:sp>
       <p:sp>
         <p:nvSpPr>
-          <p:cNvPr id="7" name="english_8"/>
+          <p:cNvPr id="10" name="pinyin_11"/>
+          <p:cNvSpPr txBox="1"/>
+          <p:nvPr/>
+        </p:nvSpPr>
+        <p:spPr>
+          <a:xfrm>
+            <a:off x="1158765" y="3036112"/>
+            <a:ext cx="568224" cy="584775"/>
+          </a:xfrm>
+          <a:prstGeom prst="rect">
+            <a:avLst/>
+          </a:prstGeom>
+          <a:noFill/>
+          <a:ln>
+            <a:noFill/>
+          </a:ln>
+        </p:spPr>
+        <p:txBody>
+          <a:bodyPr anchorCtr="0" anchor="t" bIns="45700" lIns="0" spcFirstLastPara="1" rIns="0" wrap="none" tIns="45700">
+            <a:spAutoFit/>
+          </a:bodyPr>
+          <a:lstStyle/>
+          <a:p>
+            <a:pPr indent="0" lvl="0" marL="0" marR="0" rtl="0" algn="l">
+              <a:spcBef>
+                <a:spcPts val="0"/>
+              </a:spcBef>
+              <a:spcAft>
+                <a:spcPts val="0"/>
+              </a:spcAft>
+              <a:buNone/>
+            </a:pPr>
+            <a:r>
+              <a:rPr lang="en-US" sz="3200" u="sng">
+                <a:solidFill>
+                  <a:schemeClr val="dk1"/>
+                </a:solidFill>
+                <a:latin typeface="Calibri"/>
+                <a:ea typeface="Calibri"/>
+                <a:cs typeface="Calibri"/>
+              </a:rPr>
+              <a:t>rì</a:t>
+            </a:r>
+            <a:endParaRPr sz="3200">
+              <a:solidFill>
+                <a:schemeClr val="dk1"/>
+              </a:solidFill>
+              <a:latin typeface="Calibri"/>
+              <a:ea typeface="Calibri"/>
+              <a:cs typeface="Calibri"/>
+            </a:endParaRPr>
+          </a:p>
+        </p:txBody>
+      </p:sp>
+      <p:sp>
+        <p:nvSpPr>
+          <p:cNvPr id="11" name="pinyin_12"/>
+          <p:cNvSpPr txBox="1"/>
+          <p:nvPr/>
+        </p:nvSpPr>
+        <p:spPr>
+          <a:xfrm>
+            <a:off x="1567197" y="3036112"/>
+            <a:ext cx="933984" cy="584775"/>
+          </a:xfrm>
+          <a:prstGeom prst="rect">
+            <a:avLst/>
+          </a:prstGeom>
+          <a:noFill/>
+          <a:ln>
+            <a:noFill/>
+          </a:ln>
+        </p:spPr>
+        <p:txBody>
+          <a:bodyPr anchorCtr="0" anchor="t" bIns="45700" lIns="0" spcFirstLastPara="1" rIns="0" wrap="none" tIns="45700">
+            <a:spAutoFit/>
+          </a:bodyPr>
+          <a:lstStyle/>
+          <a:p>
+            <a:pPr indent="0" lvl="0" marL="0" marR="0" rtl="0" algn="l">
+              <a:spcBef>
+                <a:spcPts val="0"/>
+              </a:spcBef>
+              <a:spcAft>
+                <a:spcPts val="0"/>
+              </a:spcAft>
+              <a:buNone/>
+            </a:pPr>
+            <a:r>
+              <a:rPr lang="en-US" sz="3200" u="sng">
+                <a:solidFill>
+                  <a:schemeClr val="dk1"/>
+                </a:solidFill>
+                <a:latin typeface="Calibri"/>
+                <a:ea typeface="Calibri"/>
+                <a:cs typeface="Calibri"/>
+              </a:rPr>
+              <a:t>sān</a:t>
+            </a:r>
+            <a:endParaRPr sz="3200">
+              <a:solidFill>
+                <a:schemeClr val="dk1"/>
+              </a:solidFill>
+              <a:latin typeface="Calibri"/>
+              <a:ea typeface="Calibri"/>
+              <a:cs typeface="Calibri"/>
+            </a:endParaRPr>
+          </a:p>
+        </p:txBody>
+      </p:sp>
+      <p:sp>
+        <p:nvSpPr>
+          <p:cNvPr id="12" name="pinyin_13"/>
+          <p:cNvSpPr txBox="1"/>
+          <p:nvPr/>
+        </p:nvSpPr>
+        <p:spPr>
+          <a:xfrm>
+            <a:off x="2301181" y="3036112"/>
+            <a:ext cx="1047776" cy="584775"/>
+          </a:xfrm>
+          <a:prstGeom prst="rect">
+            <a:avLst/>
+          </a:prstGeom>
+          <a:noFill/>
+          <a:ln>
+            <a:noFill/>
+          </a:ln>
+        </p:spPr>
+        <p:txBody>
+          <a:bodyPr anchorCtr="0" anchor="t" bIns="45700" lIns="0" spcFirstLastPara="1" rIns="0" wrap="none" tIns="45700">
+            <a:spAutoFit/>
+          </a:bodyPr>
+          <a:lstStyle/>
+          <a:p>
+            <a:pPr indent="0" lvl="0" marL="0" marR="0" rtl="0" algn="l">
+              <a:spcBef>
+                <a:spcPts val="0"/>
+              </a:spcBef>
+              <a:spcAft>
+                <a:spcPts val="0"/>
+              </a:spcAft>
+              <a:buNone/>
+            </a:pPr>
+            <a:r>
+              <a:rPr lang="en-US" sz="3200" u="sng">
+                <a:solidFill>
+                  <a:schemeClr val="dk1"/>
+                </a:solidFill>
+                <a:latin typeface="Calibri"/>
+                <a:ea typeface="Calibri"/>
+                <a:cs typeface="Calibri"/>
+              </a:rPr>
+              <a:t>xǐng</a:t>
+            </a:r>
+            <a:endParaRPr sz="3200">
+              <a:solidFill>
+                <a:schemeClr val="dk1"/>
+              </a:solidFill>
+              <a:latin typeface="Calibri"/>
+              <a:ea typeface="Calibri"/>
+              <a:cs typeface="Calibri"/>
+            </a:endParaRPr>
+          </a:p>
+        </p:txBody>
+      </p:sp>
+      <p:sp>
+        <p:nvSpPr>
+          <p:cNvPr id="13" name="pinyin_14"/>
+          <p:cNvSpPr txBox="1"/>
+          <p:nvPr/>
+        </p:nvSpPr>
+        <p:spPr>
+          <a:xfrm>
+            <a:off x="3148957" y="3036112"/>
+            <a:ext cx="844576" cy="584775"/>
+          </a:xfrm>
+          <a:prstGeom prst="rect">
+            <a:avLst/>
+          </a:prstGeom>
+          <a:noFill/>
+          <a:ln>
+            <a:noFill/>
+          </a:ln>
+        </p:spPr>
+        <p:txBody>
+          <a:bodyPr anchorCtr="0" anchor="t" bIns="45700" lIns="0" spcFirstLastPara="1" rIns="0" wrap="none" tIns="45700">
+            <a:spAutoFit/>
+          </a:bodyPr>
+          <a:lstStyle/>
+          <a:p>
+            <a:pPr indent="0" lvl="0" marL="0" marR="0" rtl="0" algn="l">
+              <a:spcBef>
+                <a:spcPts val="0"/>
+              </a:spcBef>
+              <a:spcAft>
+                <a:spcPts val="0"/>
+              </a:spcAft>
+              <a:buNone/>
+            </a:pPr>
+            <a:r>
+              <a:rPr lang="en-US" sz="3200" u="sng">
+                <a:solidFill>
+                  <a:schemeClr val="dk1"/>
+                </a:solidFill>
+                <a:latin typeface="Calibri"/>
+                <a:ea typeface="Calibri"/>
+                <a:cs typeface="Calibri"/>
+              </a:rPr>
+              <a:t>wú</a:t>
+            </a:r>
+            <a:endParaRPr sz="3200">
+              <a:solidFill>
+                <a:schemeClr val="dk1"/>
+              </a:solidFill>
+              <a:latin typeface="Calibri"/>
+              <a:ea typeface="Calibri"/>
+              <a:cs typeface="Calibri"/>
+            </a:endParaRPr>
+          </a:p>
+        </p:txBody>
+      </p:sp>
+      <p:sp>
+        <p:nvSpPr>
+          <p:cNvPr id="14" name="pinyin_15"/>
+          <p:cNvSpPr txBox="1"/>
+          <p:nvPr/>
+        </p:nvSpPr>
+        <p:spPr>
+          <a:xfrm>
+            <a:off x="3793533" y="3036112"/>
+            <a:ext cx="1145312" cy="584775"/>
+          </a:xfrm>
+          <a:prstGeom prst="rect">
+            <a:avLst/>
+          </a:prstGeom>
+          <a:noFill/>
+          <a:ln>
+            <a:noFill/>
+          </a:ln>
+        </p:spPr>
+        <p:txBody>
+          <a:bodyPr anchorCtr="0" anchor="t" bIns="45700" lIns="0" spcFirstLastPara="1" rIns="0" wrap="none" tIns="45700">
+            <a:spAutoFit/>
+          </a:bodyPr>
+          <a:lstStyle/>
+          <a:p>
+            <a:pPr indent="0" lvl="0" marL="0" marR="0" rtl="0" algn="l">
+              <a:spcBef>
+                <a:spcPts val="0"/>
+              </a:spcBef>
+              <a:spcAft>
+                <a:spcPts val="0"/>
+              </a:spcAft>
+              <a:buNone/>
+            </a:pPr>
+            <a:r>
+              <a:rPr lang="en-US" sz="3200" u="sng">
+                <a:solidFill>
+                  <a:schemeClr val="dk1"/>
+                </a:solidFill>
+                <a:latin typeface="Calibri"/>
+                <a:ea typeface="Calibri"/>
+                <a:cs typeface="Calibri"/>
+              </a:rPr>
+              <a:t>shēn</a:t>
+            </a:r>
+            <a:endParaRPr sz="3200">
+              <a:solidFill>
+                <a:schemeClr val="dk1"/>
+              </a:solidFill>
+              <a:latin typeface="Calibri"/>
+              <a:ea typeface="Calibri"/>
+              <a:cs typeface="Calibri"/>
+            </a:endParaRPr>
+          </a:p>
+        </p:txBody>
+      </p:sp>
+      <p:sp>
+        <p:nvSpPr>
+          <p:cNvPr id="15" name="pinyin_16"/>
+          <p:cNvSpPr txBox="1"/>
+          <p:nvPr/>
+        </p:nvSpPr>
+        <p:spPr>
+          <a:xfrm>
+            <a:off x="4738845" y="3036112"/>
+            <a:ext cx="421920" cy="584775"/>
+          </a:xfrm>
+          <a:prstGeom prst="rect">
+            <a:avLst/>
+          </a:prstGeom>
+          <a:noFill/>
+          <a:ln>
+            <a:noFill/>
+          </a:ln>
+        </p:spPr>
+        <p:txBody>
+          <a:bodyPr anchorCtr="0" anchor="t" bIns="45700" lIns="0" spcFirstLastPara="1" rIns="0" wrap="none" tIns="45700">
+            <a:spAutoFit/>
+          </a:bodyPr>
+          <a:lstStyle/>
+          <a:p>
+            <a:pPr indent="0" lvl="0" marL="0" marR="0" rtl="0" algn="l">
+              <a:spcBef>
+                <a:spcPts val="0"/>
+              </a:spcBef>
+              <a:spcAft>
+                <a:spcPts val="0"/>
+              </a:spcAft>
+              <a:buNone/>
+            </a:pPr>
+            <a:r>
+              <a:rPr lang="en-US" sz="3200" u="none">
+                <a:solidFill>
+                  <a:schemeClr val="dk1"/>
+                </a:solidFill>
+                <a:latin typeface="Calibri"/>
+                <a:ea typeface="Calibri"/>
+                <a:cs typeface="Calibri"/>
+              </a:rPr>
+              <a:t>:</a:t>
+            </a:r>
+            <a:endParaRPr sz="3200">
+              <a:solidFill>
+                <a:schemeClr val="dk1"/>
+              </a:solidFill>
+              <a:latin typeface="Calibri"/>
+              <a:ea typeface="Calibri"/>
+              <a:cs typeface="Calibri"/>
+            </a:endParaRPr>
+          </a:p>
+        </p:txBody>
+      </p:sp>
+      <p:sp>
+        <p:nvSpPr>
+          <p:cNvPr id="16" name="english_17"/>
           <p:cNvSpPr txBox="1"/>
           <p:nvPr/>
         </p:nvSpPr>
@@ -11960,7 +12442,7 @@
       </p:sp>
       <p:pic>
         <p:nvPicPr>
-          <p:cNvPr id="8" name="bpmf_img_9"/>
+          <p:cNvPr id="17" name="bpmf_img_18"/>
           <p:cNvPicPr preferRelativeResize="0"/>
           <p:nvPr/>
         </p:nvPicPr>
@@ -11987,14 +12469,14 @@
       </p:pic>
       <p:sp>
         <p:nvSpPr>
-          <p:cNvPr id="9" name="pinyin_10"/>
+          <p:cNvPr id="18" name="pinyin_19"/>
           <p:cNvSpPr txBox="1"/>
           <p:nvPr/>
         </p:nvSpPr>
         <p:spPr>
           <a:xfrm>
-            <a:off x="168165" y="5135024"/>
-            <a:ext cx="8807670" cy="584775"/>
+            <a:off x="174261" y="5135024"/>
+            <a:ext cx="958368" cy="584775"/>
           </a:xfrm>
           <a:prstGeom prst="rect">
             <a:avLst/>
@@ -12005,7 +12487,7 @@
           </a:ln>
         </p:spPr>
         <p:txBody>
-          <a:bodyPr anchorCtr="0" anchor="t" bIns="45700" lIns="91425" spcFirstLastPara="1" rIns="91425" wrap="square" tIns="45700">
+          <a:bodyPr anchorCtr="0" anchor="t" bIns="45700" lIns="0" spcFirstLastPara="1" rIns="0" wrap="none" tIns="45700">
             <a:spAutoFit/>
           </a:bodyPr>
           <a:lstStyle/>
@@ -12028,18 +12510,7 @@
                 <a:ea typeface="Calibri"/>
                 <a:cs typeface="Calibri"/>
               </a:rPr>
-              <a:t>Wèi   rén   móu   ér   bù   zhōng   hū</a:t>
-            </a:r>
-            <a:r>
-              <a:rPr lang="en-US" sz="3200" u="none">
-                <a:solidFill>
-                  <a:schemeClr val="dk1"/>
-                </a:solidFill>
-                <a:latin typeface="Calibri"/>
-                <a:ea typeface="Calibri"/>
-                <a:cs typeface="Calibri"/>
-              </a:rPr>
-              <a:t>   ?</a:t>
+              <a:t>Wèi</a:t>
             </a:r>
             <a:endParaRPr sz="3200">
               <a:solidFill>
@@ -12054,7 +12525,399 @@
       </p:sp>
       <p:sp>
         <p:nvSpPr>
-          <p:cNvPr id="10" name="english_11"/>
+          <p:cNvPr id="19" name="pinyin_20"/>
+          <p:cNvSpPr txBox="1"/>
+          <p:nvPr/>
+        </p:nvSpPr>
+        <p:spPr>
+          <a:xfrm>
+            <a:off x="932629" y="5135024"/>
+            <a:ext cx="877088" cy="584775"/>
+          </a:xfrm>
+          <a:prstGeom prst="rect">
+            <a:avLst/>
+          </a:prstGeom>
+          <a:noFill/>
+          <a:ln>
+            <a:noFill/>
+          </a:ln>
+        </p:spPr>
+        <p:txBody>
+          <a:bodyPr anchorCtr="0" anchor="t" bIns="45700" lIns="0" spcFirstLastPara="1" rIns="0" wrap="none" tIns="45700">
+            <a:spAutoFit/>
+          </a:bodyPr>
+          <a:lstStyle/>
+          <a:p>
+            <a:pPr indent="0" lvl="0" marL="0" marR="0" rtl="0" algn="l">
+              <a:spcBef>
+                <a:spcPts val="0"/>
+              </a:spcBef>
+              <a:spcAft>
+                <a:spcPts val="0"/>
+              </a:spcAft>
+              <a:buNone/>
+            </a:pPr>
+            <a:r>
+              <a:rPr lang="en-US" sz="3200" u="sng">
+                <a:solidFill>
+                  <a:schemeClr val="dk1"/>
+                </a:solidFill>
+                <a:latin typeface="Calibri"/>
+                <a:ea typeface="Calibri"/>
+                <a:cs typeface="Calibri"/>
+              </a:rPr>
+              <a:t>rén</a:t>
+            </a:r>
+            <a:endParaRPr sz="3200">
+              <a:solidFill>
+                <a:schemeClr val="dk1"/>
+              </a:solidFill>
+              <a:latin typeface="Calibri"/>
+              <a:ea typeface="Calibri"/>
+              <a:cs typeface="Calibri"/>
+            </a:endParaRPr>
+          </a:p>
+        </p:txBody>
+      </p:sp>
+      <p:sp>
+        <p:nvSpPr>
+          <p:cNvPr id="20" name="pinyin_21"/>
+          <p:cNvSpPr txBox="1"/>
+          <p:nvPr/>
+        </p:nvSpPr>
+        <p:spPr>
+          <a:xfrm>
+            <a:off x="1609717" y="5135024"/>
+            <a:ext cx="1055904" cy="584775"/>
+          </a:xfrm>
+          <a:prstGeom prst="rect">
+            <a:avLst/>
+          </a:prstGeom>
+          <a:noFill/>
+          <a:ln>
+            <a:noFill/>
+          </a:ln>
+        </p:spPr>
+        <p:txBody>
+          <a:bodyPr anchorCtr="0" anchor="t" bIns="45700" lIns="0" spcFirstLastPara="1" rIns="0" wrap="none" tIns="45700">
+            <a:spAutoFit/>
+          </a:bodyPr>
+          <a:lstStyle/>
+          <a:p>
+            <a:pPr indent="0" lvl="0" marL="0" marR="0" rtl="0" algn="l">
+              <a:spcBef>
+                <a:spcPts val="0"/>
+              </a:spcBef>
+              <a:spcAft>
+                <a:spcPts val="0"/>
+              </a:spcAft>
+              <a:buNone/>
+            </a:pPr>
+            <a:r>
+              <a:rPr lang="en-US" sz="3200" u="sng">
+                <a:solidFill>
+                  <a:schemeClr val="dk1"/>
+                </a:solidFill>
+                <a:latin typeface="Calibri"/>
+                <a:ea typeface="Calibri"/>
+                <a:cs typeface="Calibri"/>
+              </a:rPr>
+              <a:t>móu</a:t>
+            </a:r>
+            <a:endParaRPr sz="3200">
+              <a:solidFill>
+                <a:schemeClr val="dk1"/>
+              </a:solidFill>
+              <a:latin typeface="Calibri"/>
+              <a:ea typeface="Calibri"/>
+              <a:cs typeface="Calibri"/>
+            </a:endParaRPr>
+          </a:p>
+        </p:txBody>
+      </p:sp>
+      <p:sp>
+        <p:nvSpPr>
+          <p:cNvPr id="21" name="pinyin_22"/>
+          <p:cNvSpPr txBox="1"/>
+          <p:nvPr/>
+        </p:nvSpPr>
+        <p:spPr>
+          <a:xfrm>
+            <a:off x="2465621" y="5135024"/>
+            <a:ext cx="665760" cy="584775"/>
+          </a:xfrm>
+          <a:prstGeom prst="rect">
+            <a:avLst/>
+          </a:prstGeom>
+          <a:noFill/>
+          <a:ln>
+            <a:noFill/>
+          </a:ln>
+        </p:spPr>
+        <p:txBody>
+          <a:bodyPr anchorCtr="0" anchor="t" bIns="45700" lIns="0" spcFirstLastPara="1" rIns="0" wrap="none" tIns="45700">
+            <a:spAutoFit/>
+          </a:bodyPr>
+          <a:lstStyle/>
+          <a:p>
+            <a:pPr indent="0" lvl="0" marL="0" marR="0" rtl="0" algn="l">
+              <a:spcBef>
+                <a:spcPts val="0"/>
+              </a:spcBef>
+              <a:spcAft>
+                <a:spcPts val="0"/>
+              </a:spcAft>
+              <a:buNone/>
+            </a:pPr>
+            <a:r>
+              <a:rPr lang="en-US" sz="3200" u="sng">
+                <a:solidFill>
+                  <a:schemeClr val="dk1"/>
+                </a:solidFill>
+                <a:latin typeface="Calibri"/>
+                <a:ea typeface="Calibri"/>
+                <a:cs typeface="Calibri"/>
+              </a:rPr>
+              <a:t>ér</a:t>
+            </a:r>
+            <a:endParaRPr sz="3200">
+              <a:solidFill>
+                <a:schemeClr val="dk1"/>
+              </a:solidFill>
+              <a:latin typeface="Calibri"/>
+              <a:ea typeface="Calibri"/>
+              <a:cs typeface="Calibri"/>
+            </a:endParaRPr>
+          </a:p>
+        </p:txBody>
+      </p:sp>
+      <p:sp>
+        <p:nvSpPr>
+          <p:cNvPr id="22" name="pinyin_23"/>
+          <p:cNvSpPr txBox="1"/>
+          <p:nvPr/>
+        </p:nvSpPr>
+        <p:spPr>
+          <a:xfrm>
+            <a:off x="2989597" y="5135024"/>
+            <a:ext cx="722656" cy="584775"/>
+          </a:xfrm>
+          <a:prstGeom prst="rect">
+            <a:avLst/>
+          </a:prstGeom>
+          <a:noFill/>
+          <a:ln>
+            <a:noFill/>
+          </a:ln>
+        </p:spPr>
+        <p:txBody>
+          <a:bodyPr anchorCtr="0" anchor="t" bIns="45700" lIns="0" spcFirstLastPara="1" rIns="0" wrap="none" tIns="45700">
+            <a:spAutoFit/>
+          </a:bodyPr>
+          <a:lstStyle/>
+          <a:p>
+            <a:pPr indent="0" lvl="0" marL="0" marR="0" rtl="0" algn="l">
+              <a:spcBef>
+                <a:spcPts val="0"/>
+              </a:spcBef>
+              <a:spcAft>
+                <a:spcPts val="0"/>
+              </a:spcAft>
+              <a:buNone/>
+            </a:pPr>
+            <a:r>
+              <a:rPr lang="en-US" sz="3200" u="sng">
+                <a:solidFill>
+                  <a:schemeClr val="dk1"/>
+                </a:solidFill>
+                <a:latin typeface="Calibri"/>
+                <a:ea typeface="Calibri"/>
+                <a:cs typeface="Calibri"/>
+              </a:rPr>
+              <a:t>bù</a:t>
+            </a:r>
+            <a:endParaRPr sz="3200">
+              <a:solidFill>
+                <a:schemeClr val="dk1"/>
+              </a:solidFill>
+              <a:latin typeface="Calibri"/>
+              <a:ea typeface="Calibri"/>
+              <a:cs typeface="Calibri"/>
+            </a:endParaRPr>
+          </a:p>
+        </p:txBody>
+      </p:sp>
+      <p:sp>
+        <p:nvSpPr>
+          <p:cNvPr id="23" name="pinyin_24"/>
+          <p:cNvSpPr txBox="1"/>
+          <p:nvPr/>
+        </p:nvSpPr>
+        <p:spPr>
+          <a:xfrm>
+            <a:off x="3512253" y="5135024"/>
+            <a:ext cx="1356640" cy="584775"/>
+          </a:xfrm>
+          <a:prstGeom prst="rect">
+            <a:avLst/>
+          </a:prstGeom>
+          <a:noFill/>
+          <a:ln>
+            <a:noFill/>
+          </a:ln>
+        </p:spPr>
+        <p:txBody>
+          <a:bodyPr anchorCtr="0" anchor="t" bIns="45700" lIns="0" spcFirstLastPara="1" rIns="0" wrap="none" tIns="45700">
+            <a:spAutoFit/>
+          </a:bodyPr>
+          <a:lstStyle/>
+          <a:p>
+            <a:pPr indent="0" lvl="0" marL="0" marR="0" rtl="0" algn="l">
+              <a:spcBef>
+                <a:spcPts val="0"/>
+              </a:spcBef>
+              <a:spcAft>
+                <a:spcPts val="0"/>
+              </a:spcAft>
+              <a:buNone/>
+            </a:pPr>
+            <a:r>
+              <a:rPr lang="en-US" sz="3200" u="sng">
+                <a:solidFill>
+                  <a:schemeClr val="dk1"/>
+                </a:solidFill>
+                <a:latin typeface="Calibri"/>
+                <a:ea typeface="Calibri"/>
+                <a:cs typeface="Calibri"/>
+              </a:rPr>
+              <a:t>zhōng</a:t>
+            </a:r>
+            <a:endParaRPr sz="3200">
+              <a:solidFill>
+                <a:schemeClr val="dk1"/>
+              </a:solidFill>
+              <a:latin typeface="Calibri"/>
+              <a:ea typeface="Calibri"/>
+              <a:cs typeface="Calibri"/>
+            </a:endParaRPr>
+          </a:p>
+        </p:txBody>
+      </p:sp>
+      <p:sp>
+        <p:nvSpPr>
+          <p:cNvPr id="24" name="pinyin_25"/>
+          <p:cNvSpPr txBox="1"/>
+          <p:nvPr/>
+        </p:nvSpPr>
+        <p:spPr>
+          <a:xfrm>
+            <a:off x="4668893" y="5135024"/>
+            <a:ext cx="722656" cy="584775"/>
+          </a:xfrm>
+          <a:prstGeom prst="rect">
+            <a:avLst/>
+          </a:prstGeom>
+          <a:noFill/>
+          <a:ln>
+            <a:noFill/>
+          </a:ln>
+        </p:spPr>
+        <p:txBody>
+          <a:bodyPr anchorCtr="0" anchor="t" bIns="45700" lIns="0" spcFirstLastPara="1" rIns="0" wrap="none" tIns="45700">
+            <a:spAutoFit/>
+          </a:bodyPr>
+          <a:lstStyle/>
+          <a:p>
+            <a:pPr indent="0" lvl="0" marL="0" marR="0" rtl="0" algn="l">
+              <a:spcBef>
+                <a:spcPts val="0"/>
+              </a:spcBef>
+              <a:spcAft>
+                <a:spcPts val="0"/>
+              </a:spcAft>
+              <a:buNone/>
+            </a:pPr>
+            <a:r>
+              <a:rPr lang="en-US" sz="3200" u="sng">
+                <a:solidFill>
+                  <a:schemeClr val="dk1"/>
+                </a:solidFill>
+                <a:latin typeface="Calibri"/>
+                <a:ea typeface="Calibri"/>
+                <a:cs typeface="Calibri"/>
+              </a:rPr>
+              <a:t>hū</a:t>
+            </a:r>
+            <a:endParaRPr sz="3200">
+              <a:solidFill>
+                <a:schemeClr val="dk1"/>
+              </a:solidFill>
+              <a:latin typeface="Calibri"/>
+              <a:ea typeface="Calibri"/>
+              <a:cs typeface="Calibri"/>
+            </a:endParaRPr>
+          </a:p>
+        </p:txBody>
+      </p:sp>
+      <p:sp>
+        <p:nvSpPr>
+          <p:cNvPr id="25" name="pinyin_26"/>
+          <p:cNvSpPr txBox="1"/>
+          <p:nvPr/>
+        </p:nvSpPr>
+        <p:spPr>
+          <a:xfrm>
+            <a:off x="5191549" y="5135024"/>
+            <a:ext cx="421920" cy="584775"/>
+          </a:xfrm>
+          <a:prstGeom prst="rect">
+            <a:avLst/>
+          </a:prstGeom>
+          <a:noFill/>
+          <a:ln>
+            <a:noFill/>
+          </a:ln>
+        </p:spPr>
+        <p:txBody>
+          <a:bodyPr anchorCtr="0" anchor="t" bIns="45700" lIns="0" spcFirstLastPara="1" rIns="0" wrap="none" tIns="45700">
+            <a:spAutoFit/>
+          </a:bodyPr>
+          <a:lstStyle/>
+          <a:p>
+            <a:pPr indent="0" lvl="0" marL="0" marR="0" rtl="0" algn="l">
+              <a:spcBef>
+                <a:spcPts val="0"/>
+              </a:spcBef>
+              <a:spcAft>
+                <a:spcPts val="0"/>
+              </a:spcAft>
+              <a:buNone/>
+            </a:pPr>
+            <a:r>
+              <a:rPr lang="en-US" sz="3200" u="none">
+                <a:solidFill>
+                  <a:schemeClr val="dk1"/>
+                </a:solidFill>
+                <a:latin typeface="Calibri"/>
+                <a:ea typeface="Calibri"/>
+                <a:cs typeface="Calibri"/>
+              </a:rPr>
+              <a:t>?</a:t>
+            </a:r>
+            <a:endParaRPr sz="3200">
+              <a:solidFill>
+                <a:schemeClr val="dk1"/>
+              </a:solidFill>
+              <a:latin typeface="Calibri"/>
+              <a:ea typeface="Calibri"/>
+              <a:cs typeface="Calibri"/>
+            </a:endParaRPr>
+          </a:p>
+        </p:txBody>
+      </p:sp>
+      <p:sp>
+        <p:nvSpPr>
+          <p:cNvPr id="26" name="english_27"/>
           <p:cNvSpPr txBox="1"/>
           <p:nvPr/>
         </p:nvSpPr>
@@ -12168,8 +13031,8 @@
         </p:nvSpPr>
         <p:spPr>
           <a:xfrm>
-            <a:off x="168165" y="868912"/>
-            <a:ext cx="8807670" cy="584775"/>
+            <a:off x="280941" y="868912"/>
+            <a:ext cx="763296" cy="584775"/>
           </a:xfrm>
           <a:prstGeom prst="rect">
             <a:avLst/>
@@ -12180,7 +13043,7 @@
           </a:ln>
         </p:spPr>
         <p:txBody>
-          <a:bodyPr anchorCtr="0" anchor="t" bIns="45700" lIns="91425" spcFirstLastPara="1" rIns="91425" wrap="square" tIns="45700">
+          <a:bodyPr anchorCtr="0" anchor="t" bIns="45700" lIns="0" spcFirstLastPara="1" rIns="0" wrap="none" tIns="45700">
             <a:spAutoFit/>
           </a:bodyPr>
           <a:lstStyle/>
@@ -12203,18 +13066,7 @@
                 <a:ea typeface="Calibri"/>
                 <a:cs typeface="Calibri"/>
               </a:rPr>
-              <a:t>Yǔ   péng   yǒu   jiāo   ér   bù   xìn   hū</a:t>
-            </a:r>
-            <a:r>
-              <a:rPr lang="en-US" sz="3200" u="none">
-                <a:solidFill>
-                  <a:schemeClr val="dk1"/>
-                </a:solidFill>
-                <a:latin typeface="Calibri"/>
-                <a:ea typeface="Calibri"/>
-                <a:cs typeface="Calibri"/>
-              </a:rPr>
-              <a:t>   ?</a:t>
+              <a:t>Yǔ</a:t>
             </a:r>
             <a:endParaRPr sz="3200">
               <a:solidFill>
@@ -12229,7 +13081,455 @@
       </p:sp>
       <p:sp>
         <p:nvSpPr>
-          <p:cNvPr id="4" name="english_5"/>
+          <p:cNvPr id="4" name="pinyin_5"/>
+          <p:cNvSpPr txBox="1"/>
+          <p:nvPr/>
+        </p:nvSpPr>
+        <p:spPr>
+          <a:xfrm>
+            <a:off x="844237" y="868912"/>
+            <a:ext cx="1145312" cy="584775"/>
+          </a:xfrm>
+          <a:prstGeom prst="rect">
+            <a:avLst/>
+          </a:prstGeom>
+          <a:noFill/>
+          <a:ln>
+            <a:noFill/>
+          </a:ln>
+        </p:spPr>
+        <p:txBody>
+          <a:bodyPr anchorCtr="0" anchor="t" bIns="45700" lIns="0" spcFirstLastPara="1" rIns="0" wrap="none" tIns="45700">
+            <a:spAutoFit/>
+          </a:bodyPr>
+          <a:lstStyle/>
+          <a:p>
+            <a:pPr indent="0" lvl="0" marL="0" marR="0" rtl="0" algn="l">
+              <a:spcBef>
+                <a:spcPts val="0"/>
+              </a:spcBef>
+              <a:spcAft>
+                <a:spcPts val="0"/>
+              </a:spcAft>
+              <a:buNone/>
+            </a:pPr>
+            <a:r>
+              <a:rPr lang="en-US" sz="3200" u="sng">
+                <a:solidFill>
+                  <a:schemeClr val="dk1"/>
+                </a:solidFill>
+                <a:latin typeface="Calibri"/>
+                <a:ea typeface="Calibri"/>
+                <a:cs typeface="Calibri"/>
+              </a:rPr>
+              <a:t>péng</a:t>
+            </a:r>
+            <a:endParaRPr sz="3200">
+              <a:solidFill>
+                <a:schemeClr val="dk1"/>
+              </a:solidFill>
+              <a:latin typeface="Calibri"/>
+              <a:ea typeface="Calibri"/>
+              <a:cs typeface="Calibri"/>
+            </a:endParaRPr>
+          </a:p>
+        </p:txBody>
+      </p:sp>
+      <p:sp>
+        <p:nvSpPr>
+          <p:cNvPr id="5" name="pinyin_6"/>
+          <p:cNvSpPr txBox="1"/>
+          <p:nvPr/>
+        </p:nvSpPr>
+        <p:spPr>
+          <a:xfrm>
+            <a:off x="1789549" y="868912"/>
+            <a:ext cx="933984" cy="584775"/>
+          </a:xfrm>
+          <a:prstGeom prst="rect">
+            <a:avLst/>
+          </a:prstGeom>
+          <a:noFill/>
+          <a:ln>
+            <a:noFill/>
+          </a:ln>
+        </p:spPr>
+        <p:txBody>
+          <a:bodyPr anchorCtr="0" anchor="t" bIns="45700" lIns="0" spcFirstLastPara="1" rIns="0" wrap="none" tIns="45700">
+            <a:spAutoFit/>
+          </a:bodyPr>
+          <a:lstStyle/>
+          <a:p>
+            <a:pPr indent="0" lvl="0" marL="0" marR="0" rtl="0" algn="l">
+              <a:spcBef>
+                <a:spcPts val="0"/>
+              </a:spcBef>
+              <a:spcAft>
+                <a:spcPts val="0"/>
+              </a:spcAft>
+              <a:buNone/>
+            </a:pPr>
+            <a:r>
+              <a:rPr lang="en-US" sz="3200" u="sng">
+                <a:solidFill>
+                  <a:schemeClr val="dk1"/>
+                </a:solidFill>
+                <a:latin typeface="Calibri"/>
+                <a:ea typeface="Calibri"/>
+                <a:cs typeface="Calibri"/>
+              </a:rPr>
+              <a:t>yǒu</a:t>
+            </a:r>
+            <a:endParaRPr sz="3200">
+              <a:solidFill>
+                <a:schemeClr val="dk1"/>
+              </a:solidFill>
+              <a:latin typeface="Calibri"/>
+              <a:ea typeface="Calibri"/>
+              <a:cs typeface="Calibri"/>
+            </a:endParaRPr>
+          </a:p>
+        </p:txBody>
+      </p:sp>
+      <p:sp>
+        <p:nvSpPr>
+          <p:cNvPr id="6" name="pinyin_7"/>
+          <p:cNvSpPr txBox="1"/>
+          <p:nvPr/>
+        </p:nvSpPr>
+        <p:spPr>
+          <a:xfrm>
+            <a:off x="2523533" y="868912"/>
+            <a:ext cx="950240" cy="584775"/>
+          </a:xfrm>
+          <a:prstGeom prst="rect">
+            <a:avLst/>
+          </a:prstGeom>
+          <a:noFill/>
+          <a:ln>
+            <a:noFill/>
+          </a:ln>
+        </p:spPr>
+        <p:txBody>
+          <a:bodyPr anchorCtr="0" anchor="t" bIns="45700" lIns="0" spcFirstLastPara="1" rIns="0" wrap="none" tIns="45700">
+            <a:spAutoFit/>
+          </a:bodyPr>
+          <a:lstStyle/>
+          <a:p>
+            <a:pPr indent="0" lvl="0" marL="0" marR="0" rtl="0" algn="l">
+              <a:spcBef>
+                <a:spcPts val="0"/>
+              </a:spcBef>
+              <a:spcAft>
+                <a:spcPts val="0"/>
+              </a:spcAft>
+              <a:buNone/>
+            </a:pPr>
+            <a:r>
+              <a:rPr lang="en-US" sz="3200" u="sng">
+                <a:solidFill>
+                  <a:schemeClr val="dk1"/>
+                </a:solidFill>
+                <a:latin typeface="Calibri"/>
+                <a:ea typeface="Calibri"/>
+                <a:cs typeface="Calibri"/>
+              </a:rPr>
+              <a:t>jiāo</a:t>
+            </a:r>
+            <a:endParaRPr sz="3200">
+              <a:solidFill>
+                <a:schemeClr val="dk1"/>
+              </a:solidFill>
+              <a:latin typeface="Calibri"/>
+              <a:ea typeface="Calibri"/>
+              <a:cs typeface="Calibri"/>
+            </a:endParaRPr>
+          </a:p>
+        </p:txBody>
+      </p:sp>
+      <p:sp>
+        <p:nvSpPr>
+          <p:cNvPr id="7" name="pinyin_8"/>
+          <p:cNvSpPr txBox="1"/>
+          <p:nvPr/>
+        </p:nvSpPr>
+        <p:spPr>
+          <a:xfrm>
+            <a:off x="3273773" y="868912"/>
+            <a:ext cx="665760" cy="584775"/>
+          </a:xfrm>
+          <a:prstGeom prst="rect">
+            <a:avLst/>
+          </a:prstGeom>
+          <a:noFill/>
+          <a:ln>
+            <a:noFill/>
+          </a:ln>
+        </p:spPr>
+        <p:txBody>
+          <a:bodyPr anchorCtr="0" anchor="t" bIns="45700" lIns="0" spcFirstLastPara="1" rIns="0" wrap="none" tIns="45700">
+            <a:spAutoFit/>
+          </a:bodyPr>
+          <a:lstStyle/>
+          <a:p>
+            <a:pPr indent="0" lvl="0" marL="0" marR="0" rtl="0" algn="l">
+              <a:spcBef>
+                <a:spcPts val="0"/>
+              </a:spcBef>
+              <a:spcAft>
+                <a:spcPts val="0"/>
+              </a:spcAft>
+              <a:buNone/>
+            </a:pPr>
+            <a:r>
+              <a:rPr lang="en-US" sz="3200" u="sng">
+                <a:solidFill>
+                  <a:schemeClr val="dk1"/>
+                </a:solidFill>
+                <a:latin typeface="Calibri"/>
+                <a:ea typeface="Calibri"/>
+                <a:cs typeface="Calibri"/>
+              </a:rPr>
+              <a:t>ér</a:t>
+            </a:r>
+            <a:endParaRPr sz="3200">
+              <a:solidFill>
+                <a:schemeClr val="dk1"/>
+              </a:solidFill>
+              <a:latin typeface="Calibri"/>
+              <a:ea typeface="Calibri"/>
+              <a:cs typeface="Calibri"/>
+            </a:endParaRPr>
+          </a:p>
+        </p:txBody>
+      </p:sp>
+      <p:sp>
+        <p:nvSpPr>
+          <p:cNvPr id="8" name="pinyin_9"/>
+          <p:cNvSpPr txBox="1"/>
+          <p:nvPr/>
+        </p:nvSpPr>
+        <p:spPr>
+          <a:xfrm>
+            <a:off x="3739533" y="868912"/>
+            <a:ext cx="722656" cy="584775"/>
+          </a:xfrm>
+          <a:prstGeom prst="rect">
+            <a:avLst/>
+          </a:prstGeom>
+          <a:noFill/>
+          <a:ln>
+            <a:noFill/>
+          </a:ln>
+        </p:spPr>
+        <p:txBody>
+          <a:bodyPr anchorCtr="0" anchor="t" bIns="45700" lIns="0" spcFirstLastPara="1" rIns="0" wrap="none" tIns="45700">
+            <a:spAutoFit/>
+          </a:bodyPr>
+          <a:lstStyle/>
+          <a:p>
+            <a:pPr indent="0" lvl="0" marL="0" marR="0" rtl="0" algn="l">
+              <a:spcBef>
+                <a:spcPts val="0"/>
+              </a:spcBef>
+              <a:spcAft>
+                <a:spcPts val="0"/>
+              </a:spcAft>
+              <a:buNone/>
+            </a:pPr>
+            <a:r>
+              <a:rPr lang="en-US" sz="3200" u="sng">
+                <a:solidFill>
+                  <a:schemeClr val="dk1"/>
+                </a:solidFill>
+                <a:latin typeface="Calibri"/>
+                <a:ea typeface="Calibri"/>
+                <a:cs typeface="Calibri"/>
+              </a:rPr>
+              <a:t>bù</a:t>
+            </a:r>
+            <a:endParaRPr sz="3200">
+              <a:solidFill>
+                <a:schemeClr val="dk1"/>
+              </a:solidFill>
+              <a:latin typeface="Calibri"/>
+              <a:ea typeface="Calibri"/>
+              <a:cs typeface="Calibri"/>
+            </a:endParaRPr>
+          </a:p>
+        </p:txBody>
+      </p:sp>
+      <p:sp>
+        <p:nvSpPr>
+          <p:cNvPr id="9" name="pinyin_10"/>
+          <p:cNvSpPr txBox="1"/>
+          <p:nvPr/>
+        </p:nvSpPr>
+        <p:spPr>
+          <a:xfrm>
+            <a:off x="4262189" y="868912"/>
+            <a:ext cx="836448" cy="584775"/>
+          </a:xfrm>
+          <a:prstGeom prst="rect">
+            <a:avLst/>
+          </a:prstGeom>
+          <a:noFill/>
+          <a:ln>
+            <a:noFill/>
+          </a:ln>
+        </p:spPr>
+        <p:txBody>
+          <a:bodyPr anchorCtr="0" anchor="t" bIns="45700" lIns="0" spcFirstLastPara="1" rIns="0" wrap="none" tIns="45700">
+            <a:spAutoFit/>
+          </a:bodyPr>
+          <a:lstStyle/>
+          <a:p>
+            <a:pPr indent="0" lvl="0" marL="0" marR="0" rtl="0" algn="l">
+              <a:spcBef>
+                <a:spcPts val="0"/>
+              </a:spcBef>
+              <a:spcAft>
+                <a:spcPts val="0"/>
+              </a:spcAft>
+              <a:buNone/>
+            </a:pPr>
+            <a:r>
+              <a:rPr lang="en-US" sz="3200" u="sng">
+                <a:solidFill>
+                  <a:schemeClr val="dk1"/>
+                </a:solidFill>
+                <a:latin typeface="Calibri"/>
+                <a:ea typeface="Calibri"/>
+                <a:cs typeface="Calibri"/>
+              </a:rPr>
+              <a:t>xìn</a:t>
+            </a:r>
+            <a:endParaRPr sz="3200">
+              <a:solidFill>
+                <a:schemeClr val="dk1"/>
+              </a:solidFill>
+              <a:latin typeface="Calibri"/>
+              <a:ea typeface="Calibri"/>
+              <a:cs typeface="Calibri"/>
+            </a:endParaRPr>
+          </a:p>
+        </p:txBody>
+      </p:sp>
+      <p:sp>
+        <p:nvSpPr>
+          <p:cNvPr id="10" name="pinyin_11"/>
+          <p:cNvSpPr txBox="1"/>
+          <p:nvPr/>
+        </p:nvSpPr>
+        <p:spPr>
+          <a:xfrm>
+            <a:off x="4898637" y="868912"/>
+            <a:ext cx="722656" cy="584775"/>
+          </a:xfrm>
+          <a:prstGeom prst="rect">
+            <a:avLst/>
+          </a:prstGeom>
+          <a:noFill/>
+          <a:ln>
+            <a:noFill/>
+          </a:ln>
+        </p:spPr>
+        <p:txBody>
+          <a:bodyPr anchorCtr="0" anchor="t" bIns="45700" lIns="0" spcFirstLastPara="1" rIns="0" wrap="none" tIns="45700">
+            <a:spAutoFit/>
+          </a:bodyPr>
+          <a:lstStyle/>
+          <a:p>
+            <a:pPr indent="0" lvl="0" marL="0" marR="0" rtl="0" algn="l">
+              <a:spcBef>
+                <a:spcPts val="0"/>
+              </a:spcBef>
+              <a:spcAft>
+                <a:spcPts val="0"/>
+              </a:spcAft>
+              <a:buNone/>
+            </a:pPr>
+            <a:r>
+              <a:rPr lang="en-US" sz="3200" u="sng">
+                <a:solidFill>
+                  <a:schemeClr val="dk1"/>
+                </a:solidFill>
+                <a:latin typeface="Calibri"/>
+                <a:ea typeface="Calibri"/>
+                <a:cs typeface="Calibri"/>
+              </a:rPr>
+              <a:t>hū</a:t>
+            </a:r>
+            <a:endParaRPr sz="3200">
+              <a:solidFill>
+                <a:schemeClr val="dk1"/>
+              </a:solidFill>
+              <a:latin typeface="Calibri"/>
+              <a:ea typeface="Calibri"/>
+              <a:cs typeface="Calibri"/>
+            </a:endParaRPr>
+          </a:p>
+        </p:txBody>
+      </p:sp>
+      <p:sp>
+        <p:nvSpPr>
+          <p:cNvPr id="11" name="pinyin_12"/>
+          <p:cNvSpPr txBox="1"/>
+          <p:nvPr/>
+        </p:nvSpPr>
+        <p:spPr>
+          <a:xfrm>
+            <a:off x="5468637" y="868912"/>
+            <a:ext cx="421920" cy="584775"/>
+          </a:xfrm>
+          <a:prstGeom prst="rect">
+            <a:avLst/>
+          </a:prstGeom>
+          <a:noFill/>
+          <a:ln>
+            <a:noFill/>
+          </a:ln>
+        </p:spPr>
+        <p:txBody>
+          <a:bodyPr anchorCtr="0" anchor="t" bIns="45700" lIns="0" spcFirstLastPara="1" rIns="0" wrap="none" tIns="45700">
+            <a:spAutoFit/>
+          </a:bodyPr>
+          <a:lstStyle/>
+          <a:p>
+            <a:pPr indent="0" lvl="0" marL="0" marR="0" rtl="0" algn="l">
+              <a:spcBef>
+                <a:spcPts val="0"/>
+              </a:spcBef>
+              <a:spcAft>
+                <a:spcPts val="0"/>
+              </a:spcAft>
+              <a:buNone/>
+            </a:pPr>
+            <a:r>
+              <a:rPr lang="en-US" sz="3200" u="none">
+                <a:solidFill>
+                  <a:schemeClr val="dk1"/>
+                </a:solidFill>
+                <a:latin typeface="Calibri"/>
+                <a:ea typeface="Calibri"/>
+                <a:cs typeface="Calibri"/>
+              </a:rPr>
+              <a:t>?</a:t>
+            </a:r>
+            <a:endParaRPr sz="3200">
+              <a:solidFill>
+                <a:schemeClr val="dk1"/>
+              </a:solidFill>
+              <a:latin typeface="Calibri"/>
+              <a:ea typeface="Calibri"/>
+              <a:cs typeface="Calibri"/>
+            </a:endParaRPr>
+          </a:p>
+        </p:txBody>
+      </p:sp>
+      <p:sp>
+        <p:nvSpPr>
+          <p:cNvPr id="12" name="english_13"/>
           <p:cNvSpPr txBox="1"/>
           <p:nvPr/>
         </p:nvSpPr>
@@ -12285,7 +13585,7 @@
       </p:sp>
       <p:pic>
         <p:nvPicPr>
-          <p:cNvPr id="5" name="bpmf_img_6"/>
+          <p:cNvPr id="13" name="bpmf_img_14"/>
           <p:cNvPicPr preferRelativeResize="0"/>
           <p:nvPr/>
         </p:nvPicPr>
@@ -12312,14 +13612,14 @@
       </p:pic>
       <p:sp>
         <p:nvSpPr>
-          <p:cNvPr id="6" name="pinyin_7"/>
+          <p:cNvPr id="14" name="pinyin_15"/>
           <p:cNvSpPr txBox="1"/>
           <p:nvPr/>
         </p:nvSpPr>
         <p:spPr>
           <a:xfrm>
-            <a:off x="168165" y="2980016"/>
-            <a:ext cx="8807670" cy="584775"/>
+            <a:off x="0" y="2980016"/>
+            <a:ext cx="1397280" cy="584775"/>
           </a:xfrm>
           <a:prstGeom prst="rect">
             <a:avLst/>
@@ -12330,7 +13630,7 @@
           </a:ln>
         </p:spPr>
         <p:txBody>
-          <a:bodyPr anchorCtr="0" anchor="t" bIns="45700" lIns="91425" spcFirstLastPara="1" rIns="91425" wrap="square" tIns="45700">
+          <a:bodyPr anchorCtr="0" anchor="t" bIns="45700" lIns="0" spcFirstLastPara="1" rIns="0" wrap="none" tIns="45700">
             <a:spAutoFit/>
           </a:bodyPr>
           <a:lstStyle/>
@@ -12353,18 +13653,7 @@
                 <a:ea typeface="Calibri"/>
                 <a:cs typeface="Calibri"/>
               </a:rPr>
-              <a:t>Chuán   bù   xí   hū</a:t>
-            </a:r>
-            <a:r>
-              <a:rPr lang="en-US" sz="3200" u="none">
-                <a:solidFill>
-                  <a:schemeClr val="dk1"/>
-                </a:solidFill>
-                <a:latin typeface="Calibri"/>
-                <a:ea typeface="Calibri"/>
-                <a:cs typeface="Calibri"/>
-              </a:rPr>
-              <a:t>   ?</a:t>
+              <a:t>Chuán</a:t>
             </a:r>
             <a:endParaRPr sz="3200">
               <a:solidFill>
@@ -12379,7 +13668,231 @@
       </p:sp>
       <p:sp>
         <p:nvSpPr>
-          <p:cNvPr id="7" name="english_8"/>
+          <p:cNvPr id="15" name="pinyin_16"/>
+          <p:cNvSpPr txBox="1"/>
+          <p:nvPr/>
+        </p:nvSpPr>
+        <p:spPr>
+          <a:xfrm>
+            <a:off x="1197280" y="2980016"/>
+            <a:ext cx="722656" cy="584775"/>
+          </a:xfrm>
+          <a:prstGeom prst="rect">
+            <a:avLst/>
+          </a:prstGeom>
+          <a:noFill/>
+          <a:ln>
+            <a:noFill/>
+          </a:ln>
+        </p:spPr>
+        <p:txBody>
+          <a:bodyPr anchorCtr="0" anchor="t" bIns="45700" lIns="0" spcFirstLastPara="1" rIns="0" wrap="none" tIns="45700">
+            <a:spAutoFit/>
+          </a:bodyPr>
+          <a:lstStyle/>
+          <a:p>
+            <a:pPr indent="0" lvl="0" marL="0" marR="0" rtl="0" algn="l">
+              <a:spcBef>
+                <a:spcPts val="0"/>
+              </a:spcBef>
+              <a:spcAft>
+                <a:spcPts val="0"/>
+              </a:spcAft>
+              <a:buNone/>
+            </a:pPr>
+            <a:r>
+              <a:rPr lang="en-US" sz="3200" u="sng">
+                <a:solidFill>
+                  <a:schemeClr val="dk1"/>
+                </a:solidFill>
+                <a:latin typeface="Calibri"/>
+                <a:ea typeface="Calibri"/>
+                <a:cs typeface="Calibri"/>
+              </a:rPr>
+              <a:t>bù</a:t>
+            </a:r>
+            <a:endParaRPr sz="3200">
+              <a:solidFill>
+                <a:schemeClr val="dk1"/>
+              </a:solidFill>
+              <a:latin typeface="Calibri"/>
+              <a:ea typeface="Calibri"/>
+              <a:cs typeface="Calibri"/>
+            </a:endParaRPr>
+          </a:p>
+        </p:txBody>
+      </p:sp>
+      <p:sp>
+        <p:nvSpPr>
+          <p:cNvPr id="16" name="pinyin_17"/>
+          <p:cNvSpPr txBox="1"/>
+          <p:nvPr/>
+        </p:nvSpPr>
+        <p:spPr>
+          <a:xfrm>
+            <a:off x="1719936" y="2980016"/>
+            <a:ext cx="625120" cy="584775"/>
+          </a:xfrm>
+          <a:prstGeom prst="rect">
+            <a:avLst/>
+          </a:prstGeom>
+          <a:noFill/>
+          <a:ln>
+            <a:noFill/>
+          </a:ln>
+        </p:spPr>
+        <p:txBody>
+          <a:bodyPr anchorCtr="0" anchor="t" bIns="45700" lIns="0" spcFirstLastPara="1" rIns="0" wrap="none" tIns="45700">
+            <a:spAutoFit/>
+          </a:bodyPr>
+          <a:lstStyle/>
+          <a:p>
+            <a:pPr indent="0" lvl="0" marL="0" marR="0" rtl="0" algn="l">
+              <a:spcBef>
+                <a:spcPts val="0"/>
+              </a:spcBef>
+              <a:spcAft>
+                <a:spcPts val="0"/>
+              </a:spcAft>
+              <a:buNone/>
+            </a:pPr>
+            <a:r>
+              <a:rPr lang="en-US" sz="3200" u="sng">
+                <a:solidFill>
+                  <a:schemeClr val="dk1"/>
+                </a:solidFill>
+                <a:latin typeface="Calibri"/>
+                <a:ea typeface="Calibri"/>
+                <a:cs typeface="Calibri"/>
+              </a:rPr>
+              <a:t>xí</a:t>
+            </a:r>
+            <a:endParaRPr sz="3200">
+              <a:solidFill>
+                <a:schemeClr val="dk1"/>
+              </a:solidFill>
+              <a:latin typeface="Calibri"/>
+              <a:ea typeface="Calibri"/>
+              <a:cs typeface="Calibri"/>
+            </a:endParaRPr>
+          </a:p>
+        </p:txBody>
+      </p:sp>
+      <p:sp>
+        <p:nvSpPr>
+          <p:cNvPr id="17" name="pinyin_18"/>
+          <p:cNvSpPr txBox="1"/>
+          <p:nvPr/>
+        </p:nvSpPr>
+        <p:spPr>
+          <a:xfrm>
+            <a:off x="2255029" y="2980016"/>
+            <a:ext cx="722656" cy="584775"/>
+          </a:xfrm>
+          <a:prstGeom prst="rect">
+            <a:avLst/>
+          </a:prstGeom>
+          <a:noFill/>
+          <a:ln>
+            <a:noFill/>
+          </a:ln>
+        </p:spPr>
+        <p:txBody>
+          <a:bodyPr anchorCtr="0" anchor="t" bIns="45700" lIns="0" spcFirstLastPara="1" rIns="0" wrap="none" tIns="45700">
+            <a:spAutoFit/>
+          </a:bodyPr>
+          <a:lstStyle/>
+          <a:p>
+            <a:pPr indent="0" lvl="0" marL="0" marR="0" rtl="0" algn="l">
+              <a:spcBef>
+                <a:spcPts val="0"/>
+              </a:spcBef>
+              <a:spcAft>
+                <a:spcPts val="0"/>
+              </a:spcAft>
+              <a:buNone/>
+            </a:pPr>
+            <a:r>
+              <a:rPr lang="en-US" sz="3200" u="sng">
+                <a:solidFill>
+                  <a:schemeClr val="dk1"/>
+                </a:solidFill>
+                <a:latin typeface="Calibri"/>
+                <a:ea typeface="Calibri"/>
+                <a:cs typeface="Calibri"/>
+              </a:rPr>
+              <a:t>hū</a:t>
+            </a:r>
+            <a:endParaRPr sz="3200">
+              <a:solidFill>
+                <a:schemeClr val="dk1"/>
+              </a:solidFill>
+              <a:latin typeface="Calibri"/>
+              <a:ea typeface="Calibri"/>
+              <a:cs typeface="Calibri"/>
+            </a:endParaRPr>
+          </a:p>
+        </p:txBody>
+      </p:sp>
+      <p:sp>
+        <p:nvSpPr>
+          <p:cNvPr id="18" name="pinyin_19"/>
+          <p:cNvSpPr txBox="1"/>
+          <p:nvPr/>
+        </p:nvSpPr>
+        <p:spPr>
+          <a:xfrm>
+            <a:off x="2829069" y="2980016"/>
+            <a:ext cx="421920" cy="584775"/>
+          </a:xfrm>
+          <a:prstGeom prst="rect">
+            <a:avLst/>
+          </a:prstGeom>
+          <a:noFill/>
+          <a:ln>
+            <a:noFill/>
+          </a:ln>
+        </p:spPr>
+        <p:txBody>
+          <a:bodyPr anchorCtr="0" anchor="t" bIns="45700" lIns="0" spcFirstLastPara="1" rIns="0" wrap="none" tIns="45700">
+            <a:spAutoFit/>
+          </a:bodyPr>
+          <a:lstStyle/>
+          <a:p>
+            <a:pPr indent="0" lvl="0" marL="0" marR="0" rtl="0" algn="l">
+              <a:spcBef>
+                <a:spcPts val="0"/>
+              </a:spcBef>
+              <a:spcAft>
+                <a:spcPts val="0"/>
+              </a:spcAft>
+              <a:buNone/>
+            </a:pPr>
+            <a:r>
+              <a:rPr lang="en-US" sz="3200" u="none">
+                <a:solidFill>
+                  <a:schemeClr val="dk1"/>
+                </a:solidFill>
+                <a:latin typeface="Calibri"/>
+                <a:ea typeface="Calibri"/>
+                <a:cs typeface="Calibri"/>
+              </a:rPr>
+              <a:t>?</a:t>
+            </a:r>
+            <a:endParaRPr sz="3200">
+              <a:solidFill>
+                <a:schemeClr val="dk1"/>
+              </a:solidFill>
+              <a:latin typeface="Calibri"/>
+              <a:ea typeface="Calibri"/>
+              <a:cs typeface="Calibri"/>
+            </a:endParaRPr>
+          </a:p>
+        </p:txBody>
+      </p:sp>
+      <p:sp>
+        <p:nvSpPr>
+          <p:cNvPr id="19" name="english_20"/>
           <p:cNvSpPr txBox="1"/>
           <p:nvPr/>
         </p:nvSpPr>
